--- a/dist/초6/국어/읽기와비판/초6_국어_읽기와비판_02_관점비교하며읽기_학생용.pptx
+++ b/dist/초6/국어/읽기와비판/초6_국어_읽기와비판_02_관점비교하며읽기_학생용.pptx
@@ -120,13 +120,13 @@
   <p:extLst>
     <p:ext uri="{521415D9-36F7-43E2-AB2F-B90AF26B5E84}">
       <p14:sectionLst xmlns:p14="http://schemas.microsoft.com/office/powerpoint/2010/main">
-        <p14:section name="도입" id="{8cd51edd-1c59-5506-9b5a-0f0c056e8b98}">
+        <p14:section name="도입" id="{87dd1047-e08a-2343-4872-20fcdca4a68a}">
           <p14:sldIdLst>
             <p14:sldId id="256"/>
             <p14:sldId id="257"/>
           </p14:sldIdLst>
         </p14:section>
-        <p14:section name="개념" id="{aa3e7d95-9e7b-731a-c96d-4eb147ac0b8a}">
+        <p14:section name="개념" id="{206f4303-be83-2c15-f8f6-f707c9070b1a}">
           <p14:sldIdLst>
             <p14:sldId id="258"/>
             <p14:sldId id="259"/>
@@ -135,25 +135,25 @@
             <p14:sldId id="262"/>
           </p14:sldIdLst>
         </p14:section>
-        <p14:section name="연습" id="{729f09ca-a71b-177a-efe7-0822e81e0a84}">
+        <p14:section name="연습" id="{52d010a7-9164-60fe-c8b7-e7ca0fe9dacb}">
           <p14:sldIdLst>
             <p14:sldId id="263"/>
             <p14:sldId id="264"/>
             <p14:sldId id="265"/>
           </p14:sldIdLst>
         </p14:section>
-        <p14:section name="확인" id="{69219f3f-8c67-1ccb-3d79-36307d51c15b}">
+        <p14:section name="확인" id="{71f73e39-8b06-2290-efca-e3e930430473}">
           <p14:sldIdLst>
             <p14:sldId id="266"/>
             <p14:sldId id="267"/>
           </p14:sldIdLst>
         </p14:section>
-        <p14:section name="정리" id="{1ec375eb-6dc0-e04d-333a-a42a59c54a41}">
+        <p14:section name="정리" id="{514c5d3d-ddd5-f44c-606e-af1e929d255b}">
           <p14:sldIdLst>
             <p14:sldId id="268"/>
           </p14:sldIdLst>
         </p14:section>
-        <p14:section name="보충" id="{f21df410-9d98-0bf6-566e-a042fe52f99f}">
+        <p14:section name="보충" id="{0a332c4e-429c-5f35-f601-8d4be1ce847f}">
           <p14:sldIdLst>
             <p14:sldId id="269"/>
           </p14:sldIdLst>
@@ -7435,7 +7435,7 @@
           </p:nvPr>
         </p:nvGraphicFramePr>
         <p:xfrm>
-          <a:off x="608076" y="2621280"/>
+          <a:off x="608076" y="2231136"/>
           <a:ext cx="10972800" cy="914400"/>
         </p:xfrm>
         <a:graphic>
@@ -7447,7 +7447,7 @@
                 <a:gridCol w="4498848"/>
                 <a:gridCol w="4498848"/>
               </a:tblGrid>
-              <a:tr h="472440">
+              <a:tr h="481584">
                 <a:tc>
                   <a:txBody>
                     <a:bodyPr/>
@@ -7642,7 +7642,7 @@
                   </a:tcPr>
                 </a:tc>
               </a:tr>
-              <a:tr h="472440">
+              <a:tr h="853440">
                 <a:tc>
                   <a:txBody>
                     <a:bodyPr/>
@@ -7890,7 +7890,7 @@
                   </a:tcPr>
                 </a:tc>
               </a:tr>
-              <a:tr h="472440">
+              <a:tr h="853440">
                 <a:tc>
                   <a:txBody>
                     <a:bodyPr/>
@@ -8138,7 +8138,7 @@
                   </a:tcPr>
                 </a:tc>
               </a:tr>
-              <a:tr h="472440">
+              <a:tr h="481584">
                 <a:tc>
                   <a:txBody>
                     <a:bodyPr/>
